--- a/presentazione/overtourism-sardegna_modificata.pptx
+++ b/presentazione/overtourism-sardegna_modificata.pptx
@@ -9561,7 +9561,7 @@
               <a:buNone/>
             </a:pPr>
             <a:r>
-              <a:rPr lang="en-US" sz="1300">
+              <a:rPr lang="en-US">
                 <a:solidFill>
                   <a:schemeClr val="dk1"/>
                 </a:solidFill>
@@ -9569,9 +9569,9 @@
                 <a:ea typeface="Calibri"/>
                 <a:cs typeface="Calibri"/>
                 <a:sym typeface="Calibri"/>
+                <a:hlinkClick r:id="rId5"/>
               </a:rPr>
-              <a:t>MAPPA INTERATTIVA
-[link da pubblicare]</a:t>
+              <a:t>MAPPA INTERATTIVA</a:t>
             </a:r>
             <a:endParaRPr>
               <a:solidFill>
